--- a/Papers/Tesi-17-02.pptx
+++ b/Papers/Tesi-17-02.pptx
@@ -21,6 +21,10 @@
     <p:sldId id="275" r:id="rId15"/>
     <p:sldId id="276" r:id="rId16"/>
     <p:sldId id="282" r:id="rId17"/>
+    <p:sldId id="284" r:id="rId18"/>
+    <p:sldId id="283" r:id="rId19"/>
+    <p:sldId id="285" r:id="rId20"/>
+    <p:sldId id="286" r:id="rId21"/>
   </p:sldIdLst>
   <p:sldSz cx="12192000" cy="6858000"/>
   <p:notesSz cx="6858000" cy="9144000"/>
@@ -130,7 +134,7 @@
 <file path=ppt/revisionInfo.xml><?xml version="1.0" encoding="utf-8"?>
 <p1510:revInfo xmlns:a="http://schemas.openxmlformats.org/drawingml/2006/main" xmlns:r="http://schemas.openxmlformats.org/officeDocument/2006/relationships" xmlns:p1510="http://schemas.microsoft.com/office/powerpoint/2015/10/main">
   <p1510:revLst>
-    <p1510:client id="{B083E769-AAC2-446B-8ED0-A3651319513F}" v="9" dt="2025-04-28T13:01:32.041"/>
+    <p1510:client id="{B083E769-AAC2-446B-8ED0-A3651319513F}" v="13" dt="2025-05-20T08:49:07.731"/>
   </p1510:revLst>
 </p1510:revInfo>
 </file>
@@ -546,7 +550,7 @@
   <pc:docChgLst>
     <pc:chgData name="Francesco Moglia" userId="0d3393897040bdd5" providerId="LiveId" clId="{B083E769-AAC2-446B-8ED0-A3651319513F}"/>
     <pc:docChg chg="undo custSel addSld delSld modSld sldOrd">
-      <pc:chgData name="Francesco Moglia" userId="0d3393897040bdd5" providerId="LiveId" clId="{B083E769-AAC2-446B-8ED0-A3651319513F}" dt="2025-05-06T08:37:45.534" v="1176" actId="207"/>
+      <pc:chgData name="Francesco Moglia" userId="0d3393897040bdd5" providerId="LiveId" clId="{B083E769-AAC2-446B-8ED0-A3651319513F}" dt="2025-05-20T11:05:12.488" v="1595" actId="20577"/>
       <pc:docMkLst>
         <pc:docMk/>
       </pc:docMkLst>
@@ -670,6 +674,89 @@
           </ac:spMkLst>
         </pc:spChg>
       </pc:sldChg>
+      <pc:sldChg chg="addSp delSp modSp add mod">
+        <pc:chgData name="Francesco Moglia" userId="0d3393897040bdd5" providerId="LiveId" clId="{B083E769-AAC2-446B-8ED0-A3651319513F}" dt="2025-05-20T08:50:44.027" v="1236" actId="1076"/>
+        <pc:sldMkLst>
+          <pc:docMk/>
+          <pc:sldMk cId="800266296" sldId="283"/>
+        </pc:sldMkLst>
+        <pc:spChg chg="del mod">
+          <ac:chgData name="Francesco Moglia" userId="0d3393897040bdd5" providerId="LiveId" clId="{B083E769-AAC2-446B-8ED0-A3651319513F}" dt="2025-05-20T08:18:36.900" v="1219" actId="478"/>
+          <ac:spMkLst>
+            <pc:docMk/>
+            <pc:sldMk cId="800266296" sldId="283"/>
+            <ac:spMk id="4" creationId="{8836F42B-5C32-EF32-ABF1-1D49F792638C}"/>
+          </ac:spMkLst>
+        </pc:spChg>
+        <pc:spChg chg="mod">
+          <ac:chgData name="Francesco Moglia" userId="0d3393897040bdd5" providerId="LiveId" clId="{B083E769-AAC2-446B-8ED0-A3651319513F}" dt="2025-05-20T08:00:52.607" v="1217" actId="20577"/>
+          <ac:spMkLst>
+            <pc:docMk/>
+            <pc:sldMk cId="800266296" sldId="283"/>
+            <ac:spMk id="7" creationId="{B715E8D7-70C5-56B8-F5A5-CDD144564C77}"/>
+          </ac:spMkLst>
+        </pc:spChg>
+        <pc:graphicFrameChg chg="add mod">
+          <ac:chgData name="Francesco Moglia" userId="0d3393897040bdd5" providerId="LiveId" clId="{B083E769-AAC2-446B-8ED0-A3651319513F}" dt="2025-05-20T08:18:51.588" v="1222"/>
+          <ac:graphicFrameMkLst>
+            <pc:docMk/>
+            <pc:sldMk cId="800266296" sldId="283"/>
+            <ac:graphicFrameMk id="2" creationId="{35C818BF-B77D-E1A5-7351-695DA262253F}"/>
+          </ac:graphicFrameMkLst>
+        </pc:graphicFrameChg>
+        <pc:picChg chg="add del mod">
+          <ac:chgData name="Francesco Moglia" userId="0d3393897040bdd5" providerId="LiveId" clId="{B083E769-AAC2-446B-8ED0-A3651319513F}" dt="2025-05-20T08:34:08.442" v="1226" actId="478"/>
+          <ac:picMkLst>
+            <pc:docMk/>
+            <pc:sldMk cId="800266296" sldId="283"/>
+            <ac:picMk id="3" creationId="{E863C108-5605-BD46-24C2-5168A33675F2}"/>
+          </ac:picMkLst>
+        </pc:picChg>
+        <pc:picChg chg="add mod">
+          <ac:chgData name="Francesco Moglia" userId="0d3393897040bdd5" providerId="LiveId" clId="{B083E769-AAC2-446B-8ED0-A3651319513F}" dt="2025-05-20T08:50:44.027" v="1236" actId="1076"/>
+          <ac:picMkLst>
+            <pc:docMk/>
+            <pc:sldMk cId="800266296" sldId="283"/>
+            <ac:picMk id="6" creationId="{33812ADB-1239-4C47-555C-97F2B8C0EA2F}"/>
+          </ac:picMkLst>
+        </pc:picChg>
+      </pc:sldChg>
+      <pc:sldChg chg="modSp add mod">
+        <pc:chgData name="Francesco Moglia" userId="0d3393897040bdd5" providerId="LiveId" clId="{B083E769-AAC2-446B-8ED0-A3651319513F}" dt="2025-05-20T11:05:12.488" v="1595" actId="20577"/>
+        <pc:sldMkLst>
+          <pc:docMk/>
+          <pc:sldMk cId="591680138" sldId="284"/>
+        </pc:sldMkLst>
+        <pc:spChg chg="mod">
+          <ac:chgData name="Francesco Moglia" userId="0d3393897040bdd5" providerId="LiveId" clId="{B083E769-AAC2-446B-8ED0-A3651319513F}" dt="2025-05-20T11:05:12.488" v="1595" actId="20577"/>
+          <ac:spMkLst>
+            <pc:docMk/>
+            <pc:sldMk cId="591680138" sldId="284"/>
+            <ac:spMk id="4" creationId="{0E1716A3-2377-C375-C2E4-1973776B6D16}"/>
+          </ac:spMkLst>
+        </pc:spChg>
+      </pc:sldChg>
+      <pc:sldChg chg="new del">
+        <pc:chgData name="Francesco Moglia" userId="0d3393897040bdd5" providerId="LiveId" clId="{B083E769-AAC2-446B-8ED0-A3651319513F}" dt="2025-05-20T09:24:06.181" v="1238" actId="47"/>
+        <pc:sldMkLst>
+          <pc:docMk/>
+          <pc:sldMk cId="1300916690" sldId="284"/>
+        </pc:sldMkLst>
+      </pc:sldChg>
+      <pc:sldChg chg="new del">
+        <pc:chgData name="Francesco Moglia" userId="0d3393897040bdd5" providerId="LiveId" clId="{B083E769-AAC2-446B-8ED0-A3651319513F}" dt="2025-05-20T08:48:18.511" v="1229" actId="680"/>
+        <pc:sldMkLst>
+          <pc:docMk/>
+          <pc:sldMk cId="1889133644" sldId="284"/>
+        </pc:sldMkLst>
+      </pc:sldChg>
+      <pc:sldChg chg="add del">
+        <pc:chgData name="Francesco Moglia" userId="0d3393897040bdd5" providerId="LiveId" clId="{B083E769-AAC2-446B-8ED0-A3651319513F}" dt="2025-05-20T08:48:15.127" v="1227" actId="47"/>
+        <pc:sldMkLst>
+          <pc:docMk/>
+          <pc:sldMk cId="2083109674" sldId="284"/>
+        </pc:sldMkLst>
+      </pc:sldChg>
     </pc:docChg>
   </pc:docChgLst>
 </pc:chgInfo>
@@ -822,7 +909,7 @@
           <a:p>
             <a:fld id="{7C3BBC2E-DFFE-4CCD-A34E-AEBAB04E60F6}" type="datetimeFigureOut">
               <a:rPr lang="en-US" smtClean="0"/>
-              <a:t>5/6/2025</a:t>
+              <a:t>5/28/2025</a:t>
             </a:fld>
             <a:endParaRPr lang="en-US"/>
           </a:p>
@@ -1020,7 +1107,7 @@
           <a:p>
             <a:fld id="{7C3BBC2E-DFFE-4CCD-A34E-AEBAB04E60F6}" type="datetimeFigureOut">
               <a:rPr lang="en-US" smtClean="0"/>
-              <a:t>5/6/2025</a:t>
+              <a:t>5/28/2025</a:t>
             </a:fld>
             <a:endParaRPr lang="en-US"/>
           </a:p>
@@ -1228,7 +1315,7 @@
           <a:p>
             <a:fld id="{7C3BBC2E-DFFE-4CCD-A34E-AEBAB04E60F6}" type="datetimeFigureOut">
               <a:rPr lang="en-US" smtClean="0"/>
-              <a:t>5/6/2025</a:t>
+              <a:t>5/28/2025</a:t>
             </a:fld>
             <a:endParaRPr lang="en-US"/>
           </a:p>
@@ -1426,7 +1513,7 @@
           <a:p>
             <a:fld id="{7C3BBC2E-DFFE-4CCD-A34E-AEBAB04E60F6}" type="datetimeFigureOut">
               <a:rPr lang="en-US" smtClean="0"/>
-              <a:t>5/6/2025</a:t>
+              <a:t>5/28/2025</a:t>
             </a:fld>
             <a:endParaRPr lang="en-US"/>
           </a:p>
@@ -1701,7 +1788,7 @@
           <a:p>
             <a:fld id="{7C3BBC2E-DFFE-4CCD-A34E-AEBAB04E60F6}" type="datetimeFigureOut">
               <a:rPr lang="en-US" smtClean="0"/>
-              <a:t>5/6/2025</a:t>
+              <a:t>5/28/2025</a:t>
             </a:fld>
             <a:endParaRPr lang="en-US"/>
           </a:p>
@@ -1966,7 +2053,7 @@
           <a:p>
             <a:fld id="{7C3BBC2E-DFFE-4CCD-A34E-AEBAB04E60F6}" type="datetimeFigureOut">
               <a:rPr lang="en-US" smtClean="0"/>
-              <a:t>5/6/2025</a:t>
+              <a:t>5/28/2025</a:t>
             </a:fld>
             <a:endParaRPr lang="en-US"/>
           </a:p>
@@ -2378,7 +2465,7 @@
           <a:p>
             <a:fld id="{7C3BBC2E-DFFE-4CCD-A34E-AEBAB04E60F6}" type="datetimeFigureOut">
               <a:rPr lang="en-US" smtClean="0"/>
-              <a:t>5/6/2025</a:t>
+              <a:t>5/28/2025</a:t>
             </a:fld>
             <a:endParaRPr lang="en-US"/>
           </a:p>
@@ -2519,7 +2606,7 @@
           <a:p>
             <a:fld id="{7C3BBC2E-DFFE-4CCD-A34E-AEBAB04E60F6}" type="datetimeFigureOut">
               <a:rPr lang="en-US" smtClean="0"/>
-              <a:t>5/6/2025</a:t>
+              <a:t>5/28/2025</a:t>
             </a:fld>
             <a:endParaRPr lang="en-US"/>
           </a:p>
@@ -2632,7 +2719,7 @@
           <a:p>
             <a:fld id="{7C3BBC2E-DFFE-4CCD-A34E-AEBAB04E60F6}" type="datetimeFigureOut">
               <a:rPr lang="en-US" smtClean="0"/>
-              <a:t>5/6/2025</a:t>
+              <a:t>5/28/2025</a:t>
             </a:fld>
             <a:endParaRPr lang="en-US"/>
           </a:p>
@@ -2943,7 +3030,7 @@
           <a:p>
             <a:fld id="{7C3BBC2E-DFFE-4CCD-A34E-AEBAB04E60F6}" type="datetimeFigureOut">
               <a:rPr lang="en-US" smtClean="0"/>
-              <a:t>5/6/2025</a:t>
+              <a:t>5/28/2025</a:t>
             </a:fld>
             <a:endParaRPr lang="en-US"/>
           </a:p>
@@ -3231,7 +3318,7 @@
           <a:p>
             <a:fld id="{7C3BBC2E-DFFE-4CCD-A34E-AEBAB04E60F6}" type="datetimeFigureOut">
               <a:rPr lang="en-US" smtClean="0"/>
-              <a:t>5/6/2025</a:t>
+              <a:t>5/28/2025</a:t>
             </a:fld>
             <a:endParaRPr lang="en-US"/>
           </a:p>
@@ -3472,7 +3559,7 @@
           <a:p>
             <a:fld id="{7C3BBC2E-DFFE-4CCD-A34E-AEBAB04E60F6}" type="datetimeFigureOut">
               <a:rPr lang="en-US" smtClean="0"/>
-              <a:t>5/6/2025</a:t>
+              <a:t>5/28/2025</a:t>
             </a:fld>
             <a:endParaRPr lang="en-US"/>
           </a:p>
@@ -5428,6 +5515,522 @@
 </p:sld>
 </file>
 
+<file path=ppt/slides/slide17.xml><?xml version="1.0" encoding="utf-8"?>
+<p:sld xmlns:a="http://schemas.openxmlformats.org/drawingml/2006/main" xmlns:r="http://schemas.openxmlformats.org/officeDocument/2006/relationships" xmlns:p="http://schemas.openxmlformats.org/presentationml/2006/main">
+  <p:cSld>
+    <p:spTree>
+      <p:nvGrpSpPr>
+        <p:cNvPr id="1" name="">
+          <a:extLst>
+            <a:ext uri="{FF2B5EF4-FFF2-40B4-BE49-F238E27FC236}">
+              <a16:creationId xmlns:a16="http://schemas.microsoft.com/office/drawing/2014/main" id="{D4D47C72-7FDE-E73B-4CEB-6FDFE3EC23B5}"/>
+            </a:ext>
+          </a:extLst>
+        </p:cNvPr>
+        <p:cNvGrpSpPr/>
+        <p:nvPr/>
+      </p:nvGrpSpPr>
+      <p:grpSpPr>
+        <a:xfrm>
+          <a:off x="0" y="0"/>
+          <a:ext cx="0" cy="0"/>
+          <a:chOff x="0" y="0"/>
+          <a:chExt cx="0" cy="0"/>
+        </a:xfrm>
+      </p:grpSpPr>
+      <p:sp>
+        <p:nvSpPr>
+          <p:cNvPr id="4" name="TextBox 3">
+            <a:extLst>
+              <a:ext uri="{FF2B5EF4-FFF2-40B4-BE49-F238E27FC236}">
+                <a16:creationId xmlns:a16="http://schemas.microsoft.com/office/drawing/2014/main" id="{0E1716A3-2377-C375-C2E4-1973776B6D16}"/>
+              </a:ext>
+            </a:extLst>
+          </p:cNvPr>
+          <p:cNvSpPr txBox="1"/>
+          <p:nvPr/>
+        </p:nvSpPr>
+        <p:spPr>
+          <a:xfrm>
+            <a:off x="377186" y="1603603"/>
+            <a:ext cx="11642611" cy="4401205"/>
+          </a:xfrm>
+          <a:prstGeom prst="rect">
+            <a:avLst/>
+          </a:prstGeom>
+          <a:noFill/>
+        </p:spPr>
+        <p:txBody>
+          <a:bodyPr wrap="none" rtlCol="0">
+            <a:spAutoFit/>
+          </a:bodyPr>
+          <a:lstStyle/>
+          <a:p>
+            <a:endParaRPr lang="en-US" sz="2800" dirty="0">
+              <a:sym typeface="Wingdings" panose="05000000000000000000" pitchFamily="2" charset="2"/>
+            </a:endParaRPr>
+          </a:p>
+          <a:p>
+            <a:r>
+              <a:rPr lang="en-US" sz="2800" dirty="0">
+                <a:sym typeface="Wingdings" panose="05000000000000000000" pitchFamily="2" charset="2"/>
+              </a:rPr>
+              <a:t>Single hybrid inverter</a:t>
+            </a:r>
+          </a:p>
+          <a:p>
+            <a:r>
+              <a:rPr lang="en-US" sz="2800" dirty="0">
+                <a:sym typeface="Wingdings" panose="05000000000000000000" pitchFamily="2" charset="2"/>
+              </a:rPr>
+              <a:t>	. DC bus between PV &amp; Storage</a:t>
+            </a:r>
+          </a:p>
+          <a:p>
+            <a:r>
+              <a:rPr lang="en-US" sz="2800" dirty="0">
+                <a:sym typeface="Wingdings" panose="05000000000000000000" pitchFamily="2" charset="2"/>
+              </a:rPr>
+              <a:t>	. Inverter can inject reactive power</a:t>
+            </a:r>
+          </a:p>
+          <a:p>
+            <a:endParaRPr lang="en-US" sz="2800" dirty="0">
+              <a:sym typeface="Wingdings" panose="05000000000000000000" pitchFamily="2" charset="2"/>
+            </a:endParaRPr>
+          </a:p>
+          <a:p>
+            <a:r>
+              <a:rPr lang="en-US" sz="2800" dirty="0">
+                <a:sym typeface="Wingdings" panose="05000000000000000000" pitchFamily="2" charset="2"/>
+              </a:rPr>
+              <a:t>Reactive power should have a cost  Literature around 2€/MVAr</a:t>
+            </a:r>
+            <a:br>
+              <a:rPr lang="en-US" sz="2800" dirty="0">
+                <a:sym typeface="Wingdings" panose="05000000000000000000" pitchFamily="2" charset="2"/>
+              </a:rPr>
+            </a:br>
+            <a:br>
+              <a:rPr lang="en-US" sz="2800" dirty="0">
+                <a:sym typeface="Wingdings" panose="05000000000000000000" pitchFamily="2" charset="2"/>
+              </a:rPr>
+            </a:br>
+            <a:r>
+              <a:rPr lang="en-US" sz="2800" dirty="0">
+                <a:sym typeface="Wingdings" panose="05000000000000000000" pitchFamily="2" charset="2"/>
+              </a:rPr>
+              <a:t> Every bus has PV +inverter but the </a:t>
+            </a:r>
+            <a:r>
+              <a:rPr lang="en-US" sz="2800" dirty="0" err="1">
+                <a:sym typeface="Wingdings" panose="05000000000000000000" pitchFamily="2" charset="2"/>
+              </a:rPr>
+              <a:t>oversizeing</a:t>
+            </a:r>
+            <a:r>
+              <a:rPr lang="en-US" sz="2800" dirty="0">
+                <a:sym typeface="Wingdings" panose="05000000000000000000" pitchFamily="2" charset="2"/>
+              </a:rPr>
+              <a:t> is greater at critical buses </a:t>
+            </a:r>
+          </a:p>
+          <a:p>
+            <a:pPr marL="457200" indent="-457200">
+              <a:buFont typeface="Arial" panose="020B0604020202020204" pitchFamily="34" charset="0"/>
+              <a:buChar char="•"/>
+            </a:pPr>
+            <a:endParaRPr lang="en-US" sz="2800" dirty="0">
+              <a:sym typeface="Wingdings" panose="05000000000000000000" pitchFamily="2" charset="2"/>
+            </a:endParaRPr>
+          </a:p>
+          <a:p>
+            <a:endParaRPr lang="en-US" sz="2800" dirty="0">
+              <a:sym typeface="Wingdings" panose="05000000000000000000" pitchFamily="2" charset="2"/>
+            </a:endParaRPr>
+          </a:p>
+        </p:txBody>
+      </p:sp>
+      <p:sp>
+        <p:nvSpPr>
+          <p:cNvPr id="7" name="Title 1">
+            <a:extLst>
+              <a:ext uri="{FF2B5EF4-FFF2-40B4-BE49-F238E27FC236}">
+                <a16:creationId xmlns:a16="http://schemas.microsoft.com/office/drawing/2014/main" id="{A826CB5E-EFE5-0BDF-35C2-84A35204DED9}"/>
+              </a:ext>
+            </a:extLst>
+          </p:cNvPr>
+          <p:cNvSpPr>
+            <a:spLocks noGrp="1"/>
+          </p:cNvSpPr>
+          <p:nvPr>
+            <p:ph type="title"/>
+          </p:nvPr>
+        </p:nvSpPr>
+        <p:spPr>
+          <a:xfrm>
+            <a:off x="838200" y="365125"/>
+            <a:ext cx="10515600" cy="1325563"/>
+          </a:xfrm>
+        </p:spPr>
+        <p:txBody>
+          <a:bodyPr/>
+          <a:lstStyle/>
+          <a:p>
+            <a:r>
+              <a:rPr lang="en-US" dirty="0"/>
+              <a:t>Updates</a:t>
+            </a:r>
+          </a:p>
+        </p:txBody>
+      </p:sp>
+    </p:spTree>
+    <p:extLst>
+      <p:ext uri="{BB962C8B-B14F-4D97-AF65-F5344CB8AC3E}">
+        <p14:creationId xmlns:p14="http://schemas.microsoft.com/office/powerpoint/2010/main" val="591680138"/>
+      </p:ext>
+    </p:extLst>
+  </p:cSld>
+  <p:clrMapOvr>
+    <a:masterClrMapping/>
+  </p:clrMapOvr>
+</p:sld>
+</file>
+
+<file path=ppt/slides/slide18.xml><?xml version="1.0" encoding="utf-8"?>
+<p:sld xmlns:a="http://schemas.openxmlformats.org/drawingml/2006/main" xmlns:r="http://schemas.openxmlformats.org/officeDocument/2006/relationships" xmlns:p="http://schemas.openxmlformats.org/presentationml/2006/main">
+  <p:cSld>
+    <p:spTree>
+      <p:nvGrpSpPr>
+        <p:cNvPr id="1" name="">
+          <a:extLst>
+            <a:ext uri="{FF2B5EF4-FFF2-40B4-BE49-F238E27FC236}">
+              <a16:creationId xmlns:a16="http://schemas.microsoft.com/office/drawing/2014/main" id="{003204BC-5627-6B23-037F-61CFBB0E6B24}"/>
+            </a:ext>
+          </a:extLst>
+        </p:cNvPr>
+        <p:cNvGrpSpPr/>
+        <p:nvPr/>
+      </p:nvGrpSpPr>
+      <p:grpSpPr>
+        <a:xfrm>
+          <a:off x="0" y="0"/>
+          <a:ext cx="0" cy="0"/>
+          <a:chOff x="0" y="0"/>
+          <a:chExt cx="0" cy="0"/>
+        </a:xfrm>
+      </p:grpSpPr>
+      <p:sp>
+        <p:nvSpPr>
+          <p:cNvPr id="7" name="Title 1">
+            <a:extLst>
+              <a:ext uri="{FF2B5EF4-FFF2-40B4-BE49-F238E27FC236}">
+                <a16:creationId xmlns:a16="http://schemas.microsoft.com/office/drawing/2014/main" id="{B715E8D7-70C5-56B8-F5A5-CDD144564C77}"/>
+              </a:ext>
+            </a:extLst>
+          </p:cNvPr>
+          <p:cNvSpPr>
+            <a:spLocks noGrp="1"/>
+          </p:cNvSpPr>
+          <p:nvPr>
+            <p:ph type="title"/>
+          </p:nvPr>
+        </p:nvSpPr>
+        <p:spPr>
+          <a:xfrm>
+            <a:off x="838200" y="365125"/>
+            <a:ext cx="10515600" cy="1325563"/>
+          </a:xfrm>
+        </p:spPr>
+        <p:txBody>
+          <a:bodyPr/>
+          <a:lstStyle/>
+          <a:p>
+            <a:r>
+              <a:rPr lang="en-US" dirty="0"/>
+              <a:t>Analysis of load data</a:t>
+            </a:r>
+          </a:p>
+        </p:txBody>
+      </p:sp>
+      <p:pic>
+        <p:nvPicPr>
+          <p:cNvPr id="6" name="Picture 5" descr="A blue and orange graph&#10;&#10;AI-generated content may be incorrect.">
+            <a:extLst>
+              <a:ext uri="{FF2B5EF4-FFF2-40B4-BE49-F238E27FC236}">
+                <a16:creationId xmlns:a16="http://schemas.microsoft.com/office/drawing/2014/main" id="{33812ADB-1239-4C47-555C-97F2B8C0EA2F}"/>
+              </a:ext>
+            </a:extLst>
+          </p:cNvPr>
+          <p:cNvPicPr>
+            <a:picLocks noChangeAspect="1"/>
+          </p:cNvPicPr>
+          <p:nvPr/>
+        </p:nvPicPr>
+        <p:blipFill>
+          <a:blip r:embed="rId2">
+            <a:extLst>
+              <a:ext uri="{28A0092B-C50C-407E-A947-70E740481C1C}">
+                <a14:useLocalDpi xmlns:a14="http://schemas.microsoft.com/office/drawing/2010/main" val="0"/>
+              </a:ext>
+            </a:extLst>
+          </a:blip>
+          <a:stretch>
+            <a:fillRect/>
+          </a:stretch>
+        </p:blipFill>
+        <p:spPr>
+          <a:xfrm>
+            <a:off x="2105020" y="1451202"/>
+            <a:ext cx="7981959" cy="4789176"/>
+          </a:xfrm>
+          <a:prstGeom prst="rect">
+            <a:avLst/>
+          </a:prstGeom>
+        </p:spPr>
+      </p:pic>
+    </p:spTree>
+    <p:extLst>
+      <p:ext uri="{BB962C8B-B14F-4D97-AF65-F5344CB8AC3E}">
+        <p14:creationId xmlns:p14="http://schemas.microsoft.com/office/powerpoint/2010/main" val="800266296"/>
+      </p:ext>
+    </p:extLst>
+  </p:cSld>
+  <p:clrMapOvr>
+    <a:masterClrMapping/>
+  </p:clrMapOvr>
+</p:sld>
+</file>
+
+<file path=ppt/slides/slide19.xml><?xml version="1.0" encoding="utf-8"?>
+<p:sld xmlns:a="http://schemas.openxmlformats.org/drawingml/2006/main" xmlns:r="http://schemas.openxmlformats.org/officeDocument/2006/relationships" xmlns:p="http://schemas.openxmlformats.org/presentationml/2006/main">
+  <p:cSld>
+    <p:spTree>
+      <p:nvGrpSpPr>
+        <p:cNvPr id="1" name="">
+          <a:extLst>
+            <a:ext uri="{FF2B5EF4-FFF2-40B4-BE49-F238E27FC236}">
+              <a16:creationId xmlns:a16="http://schemas.microsoft.com/office/drawing/2014/main" id="{F6DF5D27-4252-4917-5414-A09330629312}"/>
+            </a:ext>
+          </a:extLst>
+        </p:cNvPr>
+        <p:cNvGrpSpPr/>
+        <p:nvPr/>
+      </p:nvGrpSpPr>
+      <p:grpSpPr>
+        <a:xfrm>
+          <a:off x="0" y="0"/>
+          <a:ext cx="0" cy="0"/>
+          <a:chOff x="0" y="0"/>
+          <a:chExt cx="0" cy="0"/>
+        </a:xfrm>
+      </p:grpSpPr>
+      <p:sp>
+        <p:nvSpPr>
+          <p:cNvPr id="4" name="TextBox 3">
+            <a:extLst>
+              <a:ext uri="{FF2B5EF4-FFF2-40B4-BE49-F238E27FC236}">
+                <a16:creationId xmlns:a16="http://schemas.microsoft.com/office/drawing/2014/main" id="{B73BD08D-B661-0A8F-953E-FCDC4D7C53C9}"/>
+              </a:ext>
+            </a:extLst>
+          </p:cNvPr>
+          <p:cNvSpPr txBox="1"/>
+          <p:nvPr/>
+        </p:nvSpPr>
+        <p:spPr>
+          <a:xfrm>
+            <a:off x="795619" y="1746905"/>
+            <a:ext cx="9582688" cy="4832092"/>
+          </a:xfrm>
+          <a:prstGeom prst="rect">
+            <a:avLst/>
+          </a:prstGeom>
+          <a:noFill/>
+        </p:spPr>
+        <p:txBody>
+          <a:bodyPr wrap="none" rtlCol="0">
+            <a:spAutoFit/>
+          </a:bodyPr>
+          <a:lstStyle/>
+          <a:p>
+            <a:endParaRPr lang="en-US" sz="2800" dirty="0">
+              <a:sym typeface="Wingdings" panose="05000000000000000000" pitchFamily="2" charset="2"/>
+            </a:endParaRPr>
+          </a:p>
+          <a:p>
+            <a:r>
+              <a:rPr lang="en-US" sz="2800" dirty="0">
+                <a:sym typeface="Wingdings" panose="05000000000000000000" pitchFamily="2" charset="2"/>
+              </a:rPr>
+              <a:t>The problem is too big to solve on a full campus!</a:t>
+            </a:r>
+          </a:p>
+          <a:p>
+            <a:endParaRPr lang="en-US" sz="2800" dirty="0">
+              <a:sym typeface="Wingdings" panose="05000000000000000000" pitchFamily="2" charset="2"/>
+            </a:endParaRPr>
+          </a:p>
+          <a:p>
+            <a:br>
+              <a:rPr lang="en-US" sz="2800" dirty="0">
+                <a:sym typeface="Wingdings" panose="05000000000000000000" pitchFamily="2" charset="2"/>
+              </a:rPr>
+            </a:br>
+            <a:r>
+              <a:rPr lang="en-US" sz="2800" dirty="0">
+                <a:sym typeface="Wingdings" panose="05000000000000000000" pitchFamily="2" charset="2"/>
+              </a:rPr>
+              <a:t>I can fix the best conductor </a:t>
+            </a:r>
+          </a:p>
+          <a:p>
+            <a:endParaRPr lang="en-US" sz="2800" dirty="0">
+              <a:sym typeface="Wingdings" panose="05000000000000000000" pitchFamily="2" charset="2"/>
+            </a:endParaRPr>
+          </a:p>
+          <a:p>
+            <a:endParaRPr lang="en-US" sz="2800" dirty="0">
+              <a:sym typeface="Wingdings" panose="05000000000000000000" pitchFamily="2" charset="2"/>
+            </a:endParaRPr>
+          </a:p>
+          <a:p>
+            <a:r>
+              <a:rPr lang="en-US" sz="2800" dirty="0">
+                <a:sym typeface="Wingdings" panose="05000000000000000000" pitchFamily="2" charset="2"/>
+              </a:rPr>
+              <a:t>Minimum spanning tree is forced to connect every substation</a:t>
+            </a:r>
+          </a:p>
+          <a:p>
+            <a:endParaRPr lang="en-US" sz="2800" dirty="0">
+              <a:sym typeface="Wingdings" panose="05000000000000000000" pitchFamily="2" charset="2"/>
+            </a:endParaRPr>
+          </a:p>
+          <a:p>
+            <a:pPr marL="457200" indent="-457200">
+              <a:buFont typeface="Arial" panose="020B0604020202020204" pitchFamily="34" charset="0"/>
+              <a:buChar char="•"/>
+            </a:pPr>
+            <a:endParaRPr lang="en-US" sz="2800" dirty="0">
+              <a:sym typeface="Wingdings" panose="05000000000000000000" pitchFamily="2" charset="2"/>
+            </a:endParaRPr>
+          </a:p>
+          <a:p>
+            <a:endParaRPr lang="en-US" sz="2800" dirty="0">
+              <a:sym typeface="Wingdings" panose="05000000000000000000" pitchFamily="2" charset="2"/>
+            </a:endParaRPr>
+          </a:p>
+        </p:txBody>
+      </p:sp>
+      <p:sp>
+        <p:nvSpPr>
+          <p:cNvPr id="7" name="Title 1">
+            <a:extLst>
+              <a:ext uri="{FF2B5EF4-FFF2-40B4-BE49-F238E27FC236}">
+                <a16:creationId xmlns:a16="http://schemas.microsoft.com/office/drawing/2014/main" id="{6D682628-C56B-C887-79A7-ED613FB3B16C}"/>
+              </a:ext>
+            </a:extLst>
+          </p:cNvPr>
+          <p:cNvSpPr>
+            <a:spLocks noGrp="1"/>
+          </p:cNvSpPr>
+          <p:nvPr>
+            <p:ph type="title"/>
+          </p:nvPr>
+        </p:nvSpPr>
+        <p:spPr>
+          <a:xfrm>
+            <a:off x="838200" y="365125"/>
+            <a:ext cx="10515600" cy="1325563"/>
+          </a:xfrm>
+        </p:spPr>
+        <p:txBody>
+          <a:bodyPr/>
+          <a:lstStyle/>
+          <a:p>
+            <a:r>
+              <a:rPr lang="en-US" dirty="0"/>
+              <a:t>Full campus intractability</a:t>
+            </a:r>
+          </a:p>
+        </p:txBody>
+      </p:sp>
+      <p:graphicFrame>
+        <p:nvGraphicFramePr>
+          <p:cNvPr id="8" name="Object 7">
+            <a:extLst>
+              <a:ext uri="{FF2B5EF4-FFF2-40B4-BE49-F238E27FC236}">
+                <a16:creationId xmlns:a16="http://schemas.microsoft.com/office/drawing/2014/main" id="{EAABAD7C-74CA-1CFC-E93B-5DE2F84FA5B4}"/>
+              </a:ext>
+            </a:extLst>
+          </p:cNvPr>
+          <p:cNvGraphicFramePr>
+            <a:graphicFrameLocks noChangeAspect="1"/>
+          </p:cNvGraphicFramePr>
+          <p:nvPr>
+            <p:extLst>
+              <p:ext uri="{D42A27DB-BD31-4B8C-83A1-F6EECF244321}">
+                <p14:modId xmlns:p14="http://schemas.microsoft.com/office/powerpoint/2010/main" val="86255989"/>
+              </p:ext>
+            </p:extLst>
+          </p:nvPr>
+        </p:nvGraphicFramePr>
+        <p:xfrm>
+          <a:off x="5586963" y="3429000"/>
+          <a:ext cx="2061312" cy="693123"/>
+        </p:xfrm>
+        <a:graphic>
+          <a:graphicData uri="http://schemas.openxmlformats.org/presentationml/2006/ole">
+            <mc:AlternateContent xmlns:mc="http://schemas.openxmlformats.org/markup-compatibility/2006">
+              <mc:Choice xmlns:v="urn:schemas-microsoft-com:vml" Requires="v">
+                <p:oleObj name="Packager Shell Object" showAsIcon="1" r:id="rId2" imgW="1714576" imgH="519214" progId="Package">
+                  <p:embed/>
+                </p:oleObj>
+              </mc:Choice>
+              <mc:Fallback>
+                <p:oleObj name="Packager Shell Object" showAsIcon="1" r:id="rId2" imgW="1714576" imgH="519214" progId="Package">
+                  <p:embed/>
+                  <p:pic>
+                    <p:nvPicPr>
+                      <p:cNvPr id="0" name=""/>
+                      <p:cNvPicPr/>
+                      <p:nvPr/>
+                    </p:nvPicPr>
+                    <p:blipFill>
+                      <a:blip r:embed="rId3"/>
+                      <a:stretch>
+                        <a:fillRect/>
+                      </a:stretch>
+                    </p:blipFill>
+                    <p:spPr>
+                      <a:xfrm>
+                        <a:off x="5586963" y="3429000"/>
+                        <a:ext cx="2061312" cy="693123"/>
+                      </a:xfrm>
+                      <a:prstGeom prst="rect">
+                        <a:avLst/>
+                      </a:prstGeom>
+                    </p:spPr>
+                  </p:pic>
+                </p:oleObj>
+              </mc:Fallback>
+            </mc:AlternateContent>
+          </a:graphicData>
+        </a:graphic>
+      </p:graphicFrame>
+    </p:spTree>
+    <p:extLst>
+      <p:ext uri="{BB962C8B-B14F-4D97-AF65-F5344CB8AC3E}">
+        <p14:creationId xmlns:p14="http://schemas.microsoft.com/office/powerpoint/2010/main" val="591770033"/>
+      </p:ext>
+    </p:extLst>
+  </p:cSld>
+  <p:clrMapOvr>
+    <a:masterClrMapping/>
+  </p:clrMapOvr>
+</p:sld>
+</file>
+
 <file path=ppt/slides/slide2.xml><?xml version="1.0" encoding="utf-8"?>
 <p:sld xmlns:a="http://schemas.openxmlformats.org/drawingml/2006/main" xmlns:r="http://schemas.openxmlformats.org/officeDocument/2006/relationships" xmlns:p="http://schemas.openxmlformats.org/presentationml/2006/main">
   <p:cSld>
@@ -5550,6 +6153,189 @@
     <p:extLst>
       <p:ext uri="{BB962C8B-B14F-4D97-AF65-F5344CB8AC3E}">
         <p14:creationId xmlns:p14="http://schemas.microsoft.com/office/powerpoint/2010/main" val="1015923601"/>
+      </p:ext>
+    </p:extLst>
+  </p:cSld>
+  <p:clrMapOvr>
+    <a:masterClrMapping/>
+  </p:clrMapOvr>
+</p:sld>
+</file>
+
+<file path=ppt/slides/slide20.xml><?xml version="1.0" encoding="utf-8"?>
+<p:sld xmlns:a="http://schemas.openxmlformats.org/drawingml/2006/main" xmlns:r="http://schemas.openxmlformats.org/officeDocument/2006/relationships" xmlns:p="http://schemas.openxmlformats.org/presentationml/2006/main">
+  <p:cSld>
+    <p:spTree>
+      <p:nvGrpSpPr>
+        <p:cNvPr id="1" name="">
+          <a:extLst>
+            <a:ext uri="{FF2B5EF4-FFF2-40B4-BE49-F238E27FC236}">
+              <a16:creationId xmlns:a16="http://schemas.microsoft.com/office/drawing/2014/main" id="{A754776C-A319-5B9C-3490-DC9AF3C94D4A}"/>
+            </a:ext>
+          </a:extLst>
+        </p:cNvPr>
+        <p:cNvGrpSpPr/>
+        <p:nvPr/>
+      </p:nvGrpSpPr>
+      <p:grpSpPr>
+        <a:xfrm>
+          <a:off x="0" y="0"/>
+          <a:ext cx="0" cy="0"/>
+          <a:chOff x="0" y="0"/>
+          <a:chExt cx="0" cy="0"/>
+        </a:xfrm>
+      </p:grpSpPr>
+      <p:sp>
+        <p:nvSpPr>
+          <p:cNvPr id="4" name="TextBox 3">
+            <a:extLst>
+              <a:ext uri="{FF2B5EF4-FFF2-40B4-BE49-F238E27FC236}">
+                <a16:creationId xmlns:a16="http://schemas.microsoft.com/office/drawing/2014/main" id="{2E5012BF-A41C-7172-DDB8-AA6438450B24}"/>
+              </a:ext>
+            </a:extLst>
+          </p:cNvPr>
+          <p:cNvSpPr txBox="1"/>
+          <p:nvPr/>
+        </p:nvSpPr>
+        <p:spPr>
+          <a:xfrm>
+            <a:off x="838200" y="1637724"/>
+            <a:ext cx="8280142" cy="4401205"/>
+          </a:xfrm>
+          <a:prstGeom prst="rect">
+            <a:avLst/>
+          </a:prstGeom>
+          <a:noFill/>
+        </p:spPr>
+        <p:txBody>
+          <a:bodyPr wrap="square" rtlCol="0">
+            <a:spAutoFit/>
+          </a:bodyPr>
+          <a:lstStyle/>
+          <a:p>
+            <a:endParaRPr lang="en-US" sz="2800" dirty="0">
+              <a:sym typeface="Wingdings" panose="05000000000000000000" pitchFamily="2" charset="2"/>
+            </a:endParaRPr>
+          </a:p>
+          <a:p>
+            <a:pPr marL="457200" indent="-457200">
+              <a:buFont typeface="Arial" panose="020B0604020202020204" pitchFamily="34" charset="0"/>
+              <a:buChar char="•"/>
+            </a:pPr>
+            <a:r>
+              <a:rPr lang="en-US" sz="2800" dirty="0">
+                <a:sym typeface="Wingdings" panose="05000000000000000000" pitchFamily="2" charset="2"/>
+              </a:rPr>
+              <a:t>Starting from obtained topology and line loading try to downgrade conductors</a:t>
+            </a:r>
+          </a:p>
+          <a:p>
+            <a:pPr marL="457200" indent="-457200">
+              <a:buFont typeface="Arial" panose="020B0604020202020204" pitchFamily="34" charset="0"/>
+              <a:buChar char="•"/>
+            </a:pPr>
+            <a:endParaRPr lang="en-US" sz="2800" dirty="0">
+              <a:sym typeface="Wingdings" panose="05000000000000000000" pitchFamily="2" charset="2"/>
+            </a:endParaRPr>
+          </a:p>
+          <a:p>
+            <a:pPr marL="457200" indent="-457200">
+              <a:buFont typeface="Arial" panose="020B0604020202020204" pitchFamily="34" charset="0"/>
+              <a:buChar char="•"/>
+            </a:pPr>
+            <a:r>
+              <a:rPr lang="en-US" sz="2800" dirty="0">
+                <a:sym typeface="Wingdings" panose="05000000000000000000" pitchFamily="2" charset="2"/>
+              </a:rPr>
+              <a:t>Dividing problem by district</a:t>
+            </a:r>
+          </a:p>
+          <a:p>
+            <a:pPr marL="457200" indent="-457200">
+              <a:buFont typeface="Arial" panose="020B0604020202020204" pitchFamily="34" charset="0"/>
+              <a:buChar char="•"/>
+            </a:pPr>
+            <a:endParaRPr lang="en-US" sz="2800" dirty="0">
+              <a:sym typeface="Wingdings" panose="05000000000000000000" pitchFamily="2" charset="2"/>
+            </a:endParaRPr>
+          </a:p>
+          <a:p>
+            <a:pPr marL="457200" indent="-457200">
+              <a:buFont typeface="Arial" panose="020B0604020202020204" pitchFamily="34" charset="0"/>
+              <a:buChar char="•"/>
+            </a:pPr>
+            <a:r>
+              <a:rPr lang="en-US" sz="2800" dirty="0">
+                <a:sym typeface="Wingdings" panose="05000000000000000000" pitchFamily="2" charset="2"/>
+              </a:rPr>
+              <a:t>Dividing MV and LV problems</a:t>
+            </a:r>
+          </a:p>
+          <a:p>
+            <a:pPr marL="457200" indent="-457200">
+              <a:buFont typeface="Arial" panose="020B0604020202020204" pitchFamily="34" charset="0"/>
+              <a:buChar char="•"/>
+            </a:pPr>
+            <a:endParaRPr lang="en-US" sz="2800" dirty="0">
+              <a:sym typeface="Wingdings" panose="05000000000000000000" pitchFamily="2" charset="2"/>
+            </a:endParaRPr>
+          </a:p>
+          <a:p>
+            <a:pPr marL="457200" indent="-457200">
+              <a:buFont typeface="Arial" panose="020B0604020202020204" pitchFamily="34" charset="0"/>
+              <a:buChar char="•"/>
+            </a:pPr>
+            <a:r>
+              <a:rPr lang="en-US" sz="2800" dirty="0">
+                <a:sym typeface="Wingdings" panose="05000000000000000000" pitchFamily="2" charset="2"/>
+              </a:rPr>
+              <a:t>Obtaining a gap with respect to the full problem</a:t>
+            </a:r>
+          </a:p>
+          <a:p>
+            <a:endParaRPr lang="en-US" sz="2800" dirty="0">
+              <a:sym typeface="Wingdings" panose="05000000000000000000" pitchFamily="2" charset="2"/>
+            </a:endParaRPr>
+          </a:p>
+        </p:txBody>
+      </p:sp>
+      <p:sp>
+        <p:nvSpPr>
+          <p:cNvPr id="7" name="Title 1">
+            <a:extLst>
+              <a:ext uri="{FF2B5EF4-FFF2-40B4-BE49-F238E27FC236}">
+                <a16:creationId xmlns:a16="http://schemas.microsoft.com/office/drawing/2014/main" id="{04F84689-6D87-FFDE-C737-B990D10FC3F3}"/>
+              </a:ext>
+            </a:extLst>
+          </p:cNvPr>
+          <p:cNvSpPr>
+            <a:spLocks noGrp="1"/>
+          </p:cNvSpPr>
+          <p:nvPr>
+            <p:ph type="title"/>
+          </p:nvPr>
+        </p:nvSpPr>
+        <p:spPr>
+          <a:xfrm>
+            <a:off x="838200" y="365125"/>
+            <a:ext cx="10515600" cy="1325563"/>
+          </a:xfrm>
+        </p:spPr>
+        <p:txBody>
+          <a:bodyPr/>
+          <a:lstStyle/>
+          <a:p>
+            <a:r>
+              <a:rPr lang="en-US" dirty="0"/>
+              <a:t>Next steps</a:t>
+            </a:r>
+          </a:p>
+        </p:txBody>
+      </p:sp>
+    </p:spTree>
+    <p:extLst>
+      <p:ext uri="{BB962C8B-B14F-4D97-AF65-F5344CB8AC3E}">
+        <p14:creationId xmlns:p14="http://schemas.microsoft.com/office/powerpoint/2010/main" val="1761759755"/>
       </p:ext>
     </p:extLst>
   </p:cSld>
